--- a/Presentation/thesisPresentation4-V2.pptx
+++ b/Presentation/thesisPresentation4-V2.pptx
@@ -6,10 +6,10 @@
     <p:sldMasterId id="2147483767" r:id="rId5"/>
   </p:sldMasterIdLst>
   <p:notesMasterIdLst>
-    <p:notesMasterId r:id="rId21"/>
+    <p:notesMasterId r:id="rId22"/>
   </p:notesMasterIdLst>
   <p:handoutMasterIdLst>
-    <p:handoutMasterId r:id="rId22"/>
+    <p:handoutMasterId r:id="rId23"/>
   </p:handoutMasterIdLst>
   <p:sldIdLst>
     <p:sldId id="256" r:id="rId6"/>
@@ -26,22 +26,23 @@
     <p:sldId id="435" r:id="rId17"/>
     <p:sldId id="436" r:id="rId18"/>
     <p:sldId id="439" r:id="rId19"/>
-    <p:sldId id="421" r:id="rId20"/>
+    <p:sldId id="440" r:id="rId20"/>
+    <p:sldId id="421" r:id="rId21"/>
   </p:sldIdLst>
   <p:sldSz cx="12192000" cy="6858000"/>
   <p:notesSz cx="6858000" cy="9144000"/>
   <p:embeddedFontLst>
     <p:embeddedFont>
       <p:font typeface="Poppins" pitchFamily="2" charset="77"/>
-      <p:regular r:id="rId23"/>
-      <p:bold r:id="rId24"/>
-      <p:italic r:id="rId25"/>
-      <p:boldItalic r:id="rId26"/>
+      <p:regular r:id="rId24"/>
+      <p:bold r:id="rId25"/>
+      <p:italic r:id="rId26"/>
+      <p:boldItalic r:id="rId27"/>
     </p:embeddedFont>
     <p:embeddedFont>
       <p:font typeface="Poppins Medium" panose="00000600000000000000" pitchFamily="2" charset="77"/>
-      <p:regular r:id="rId27"/>
-      <p:italic r:id="rId28"/>
+      <p:regular r:id="rId28"/>
+      <p:italic r:id="rId29"/>
     </p:embeddedFont>
   </p:embeddedFontLst>
   <p:defaultTextStyle>
@@ -1304,7 +1305,7 @@
           <a:p>
             <a:fld id="{35B8FE5C-85ED-194D-A826-552950995C66}" type="slidenum">
               <a:rPr lang="it-IT" smtClean="0"/>
-              <a:t>15</a:t>
+              <a:t>16</a:t>
             </a:fld>
             <a:endParaRPr lang="it-IT"/>
           </a:p>
@@ -6389,10 +6390,201 @@
   <p:clrMapOvr>
     <a:masterClrMapping/>
   </p:clrMapOvr>
+  <mc:AlternateContent xmlns:mc="http://schemas.openxmlformats.org/markup-compatibility/2006">
+    <mc:Choice xmlns:p159="http://schemas.microsoft.com/office/powerpoint/2015/09/main" Requires="p159">
+      <p:transition xmlns:p14="http://schemas.microsoft.com/office/powerpoint/2010/main" spd="slow" p14:dur="2000">
+        <p159:morph option="byObject"/>
+      </p:transition>
+    </mc:Choice>
+    <mc:Fallback>
+      <p:transition spd="slow">
+        <p:fade/>
+      </p:transition>
+    </mc:Fallback>
+  </mc:AlternateContent>
 </p:sld>
 </file>
 
 <file path=ppt/slides/slide15.xml><?xml version="1.0" encoding="utf-8"?>
+<p:sld xmlns:a="http://schemas.openxmlformats.org/drawingml/2006/main" xmlns:r="http://schemas.openxmlformats.org/officeDocument/2006/relationships" xmlns:p="http://schemas.openxmlformats.org/presentationml/2006/main">
+  <p:cSld>
+    <p:spTree>
+      <p:nvGrpSpPr>
+        <p:cNvPr id="1" name="">
+          <a:extLst>
+            <a:ext uri="{FF2B5EF4-FFF2-40B4-BE49-F238E27FC236}">
+              <a16:creationId xmlns:a16="http://schemas.microsoft.com/office/drawing/2014/main" id="{C69AA00C-C2F6-C3BA-CB8C-79E2EF819890}"/>
+            </a:ext>
+          </a:extLst>
+        </p:cNvPr>
+        <p:cNvGrpSpPr/>
+        <p:nvPr/>
+      </p:nvGrpSpPr>
+      <p:grpSpPr>
+        <a:xfrm>
+          <a:off x="0" y="0"/>
+          <a:ext cx="0" cy="0"/>
+          <a:chOff x="0" y="0"/>
+          <a:chExt cx="0" cy="0"/>
+        </a:xfrm>
+      </p:grpSpPr>
+      <p:sp>
+        <p:nvSpPr>
+          <p:cNvPr id="2" name="Title 1">
+            <a:extLst>
+              <a:ext uri="{FF2B5EF4-FFF2-40B4-BE49-F238E27FC236}">
+                <a16:creationId xmlns:a16="http://schemas.microsoft.com/office/drawing/2014/main" id="{70AE3FA2-C154-7DA7-F295-F47DC360BC8E}"/>
+              </a:ext>
+            </a:extLst>
+          </p:cNvPr>
+          <p:cNvSpPr>
+            <a:spLocks noGrp="1"/>
+          </p:cNvSpPr>
+          <p:nvPr>
+            <p:ph type="title"/>
+          </p:nvPr>
+        </p:nvSpPr>
+        <p:spPr>
+          <a:xfrm>
+            <a:off x="180000" y="180000"/>
+            <a:ext cx="11880000" cy="648000"/>
+          </a:xfrm>
+        </p:spPr>
+        <p:txBody>
+          <a:bodyPr anchor="ctr">
+            <a:normAutofit/>
+          </a:bodyPr>
+          <a:lstStyle/>
+          <a:p>
+            <a:r>
+              <a:rPr lang="en-US" sz="3200" dirty="0"/>
+              <a:t>Correlation </a:t>
+            </a:r>
+            <a:r>
+              <a:rPr lang="en-US" sz="3200" dirty="0" err="1"/>
+              <a:t>HeatMap</a:t>
+            </a:r>
+            <a:endParaRPr lang="en-US" sz="3200" dirty="0"/>
+          </a:p>
+        </p:txBody>
+      </p:sp>
+      <p:pic>
+        <p:nvPicPr>
+          <p:cNvPr id="7" name="Picture 6">
+            <a:extLst>
+              <a:ext uri="{FF2B5EF4-FFF2-40B4-BE49-F238E27FC236}">
+                <a16:creationId xmlns:a16="http://schemas.microsoft.com/office/drawing/2014/main" id="{9D3C961D-753A-04AF-C460-6EFFBD92F4CE}"/>
+              </a:ext>
+            </a:extLst>
+          </p:cNvPr>
+          <p:cNvPicPr>
+            <a:picLocks noChangeAspect="1"/>
+          </p:cNvPicPr>
+          <p:nvPr/>
+        </p:nvPicPr>
+        <p:blipFill>
+          <a:blip r:embed="rId2"/>
+          <a:srcRect l="3902" t="86429" r="9705" b="-43"/>
+          <a:stretch>
+            <a:fillRect/>
+          </a:stretch>
+        </p:blipFill>
+        <p:spPr>
+          <a:xfrm>
+            <a:off x="333037" y="3986281"/>
+            <a:ext cx="11525926" cy="1595264"/>
+          </a:xfrm>
+          <a:prstGeom prst="rect">
+            <a:avLst/>
+          </a:prstGeom>
+        </p:spPr>
+      </p:pic>
+      <p:pic>
+        <p:nvPicPr>
+          <p:cNvPr id="8" name="Picture 7">
+            <a:extLst>
+              <a:ext uri="{FF2B5EF4-FFF2-40B4-BE49-F238E27FC236}">
+                <a16:creationId xmlns:a16="http://schemas.microsoft.com/office/drawing/2014/main" id="{1E4FF248-FDF0-4474-9A47-1A5D8CD79029}"/>
+              </a:ext>
+            </a:extLst>
+          </p:cNvPr>
+          <p:cNvPicPr>
+            <a:picLocks noChangeAspect="1"/>
+          </p:cNvPicPr>
+          <p:nvPr/>
+        </p:nvPicPr>
+        <p:blipFill>
+          <a:blip r:embed="rId3"/>
+          <a:stretch>
+            <a:fillRect/>
+          </a:stretch>
+        </p:blipFill>
+        <p:spPr>
+          <a:xfrm>
+            <a:off x="1154801" y="1276455"/>
+            <a:ext cx="3910814" cy="1921981"/>
+          </a:xfrm>
+          <a:prstGeom prst="rect">
+            <a:avLst/>
+          </a:prstGeom>
+        </p:spPr>
+      </p:pic>
+      <p:pic>
+        <p:nvPicPr>
+          <p:cNvPr id="10" name="Picture 9">
+            <a:extLst>
+              <a:ext uri="{FF2B5EF4-FFF2-40B4-BE49-F238E27FC236}">
+                <a16:creationId xmlns:a16="http://schemas.microsoft.com/office/drawing/2014/main" id="{5BA28632-1B40-7841-6513-787685DD9303}"/>
+              </a:ext>
+            </a:extLst>
+          </p:cNvPr>
+          <p:cNvPicPr>
+            <a:picLocks noChangeAspect="1"/>
+          </p:cNvPicPr>
+          <p:nvPr/>
+        </p:nvPicPr>
+        <p:blipFill>
+          <a:blip r:embed="rId4"/>
+          <a:stretch>
+            <a:fillRect/>
+          </a:stretch>
+        </p:blipFill>
+        <p:spPr>
+          <a:xfrm>
+            <a:off x="6649292" y="1276455"/>
+            <a:ext cx="3910813" cy="1955407"/>
+          </a:xfrm>
+          <a:prstGeom prst="rect">
+            <a:avLst/>
+          </a:prstGeom>
+        </p:spPr>
+      </p:pic>
+    </p:spTree>
+    <p:extLst>
+      <p:ext uri="{BB962C8B-B14F-4D97-AF65-F5344CB8AC3E}">
+        <p14:creationId xmlns:p14="http://schemas.microsoft.com/office/powerpoint/2010/main" val="64340661"/>
+      </p:ext>
+    </p:extLst>
+  </p:cSld>
+  <p:clrMapOvr>
+    <a:masterClrMapping/>
+  </p:clrMapOvr>
+  <mc:AlternateContent xmlns:mc="http://schemas.openxmlformats.org/markup-compatibility/2006">
+    <mc:Choice xmlns:p159="http://schemas.microsoft.com/office/powerpoint/2015/09/main" Requires="p159">
+      <p:transition xmlns:p14="http://schemas.microsoft.com/office/powerpoint/2010/main" spd="slow" p14:dur="2000">
+        <p159:morph option="byObject"/>
+      </p:transition>
+    </mc:Choice>
+    <mc:Fallback>
+      <p:transition spd="slow">
+        <p:fade/>
+      </p:transition>
+    </mc:Fallback>
+  </mc:AlternateContent>
+</p:sld>
+</file>
+
+<file path=ppt/slides/slide16.xml><?xml version="1.0" encoding="utf-8"?>
 <p:sld xmlns:a="http://schemas.openxmlformats.org/drawingml/2006/main" xmlns:r="http://schemas.openxmlformats.org/officeDocument/2006/relationships" xmlns:p="http://schemas.openxmlformats.org/presentationml/2006/main">
   <p:cSld>
     <p:spTree>
